--- a/magnetic_sim/ANSYS/main/figures/doc/Paper_fig_V9.pptx
+++ b/magnetic_sim/ANSYS/main/figures/doc/Paper_fig_V9.pptx
@@ -269,7 +269,7 @@
           <a:p>
             <a:fld id="{819CCEB0-8531-4DC7-874B-C34BB5A237D1}" type="datetimeFigureOut">
               <a:rPr lang="zh-TW" altLang="en-US" smtClean="0"/>
-              <a:t>2026/8/26</a:t>
+              <a:t>2026/8/28</a:t>
             </a:fld>
             <a:endParaRPr lang="zh-TW" altLang="en-US"/>
           </a:p>
@@ -467,7 +467,7 @@
           <a:p>
             <a:fld id="{819CCEB0-8531-4DC7-874B-C34BB5A237D1}" type="datetimeFigureOut">
               <a:rPr lang="zh-TW" altLang="en-US" smtClean="0"/>
-              <a:t>2026/8/26</a:t>
+              <a:t>2026/8/28</a:t>
             </a:fld>
             <a:endParaRPr lang="zh-TW" altLang="en-US"/>
           </a:p>
@@ -675,7 +675,7 @@
           <a:p>
             <a:fld id="{819CCEB0-8531-4DC7-874B-C34BB5A237D1}" type="datetimeFigureOut">
               <a:rPr lang="zh-TW" altLang="en-US" smtClean="0"/>
-              <a:t>2026/8/26</a:t>
+              <a:t>2026/8/28</a:t>
             </a:fld>
             <a:endParaRPr lang="zh-TW" altLang="en-US"/>
           </a:p>
@@ -873,7 +873,7 @@
           <a:p>
             <a:fld id="{819CCEB0-8531-4DC7-874B-C34BB5A237D1}" type="datetimeFigureOut">
               <a:rPr lang="zh-TW" altLang="en-US" smtClean="0"/>
-              <a:t>2026/8/26</a:t>
+              <a:t>2026/8/28</a:t>
             </a:fld>
             <a:endParaRPr lang="zh-TW" altLang="en-US"/>
           </a:p>
@@ -1148,7 +1148,7 @@
           <a:p>
             <a:fld id="{819CCEB0-8531-4DC7-874B-C34BB5A237D1}" type="datetimeFigureOut">
               <a:rPr lang="zh-TW" altLang="en-US" smtClean="0"/>
-              <a:t>2026/8/26</a:t>
+              <a:t>2026/8/28</a:t>
             </a:fld>
             <a:endParaRPr lang="zh-TW" altLang="en-US"/>
           </a:p>
@@ -1413,7 +1413,7 @@
           <a:p>
             <a:fld id="{819CCEB0-8531-4DC7-874B-C34BB5A237D1}" type="datetimeFigureOut">
               <a:rPr lang="zh-TW" altLang="en-US" smtClean="0"/>
-              <a:t>2026/8/26</a:t>
+              <a:t>2026/8/28</a:t>
             </a:fld>
             <a:endParaRPr lang="zh-TW" altLang="en-US"/>
           </a:p>
@@ -1825,7 +1825,7 @@
           <a:p>
             <a:fld id="{819CCEB0-8531-4DC7-874B-C34BB5A237D1}" type="datetimeFigureOut">
               <a:rPr lang="zh-TW" altLang="en-US" smtClean="0"/>
-              <a:t>2026/8/26</a:t>
+              <a:t>2026/8/28</a:t>
             </a:fld>
             <a:endParaRPr lang="zh-TW" altLang="en-US"/>
           </a:p>
@@ -1966,7 +1966,7 @@
           <a:p>
             <a:fld id="{819CCEB0-8531-4DC7-874B-C34BB5A237D1}" type="datetimeFigureOut">
               <a:rPr lang="zh-TW" altLang="en-US" smtClean="0"/>
-              <a:t>2026/8/26</a:t>
+              <a:t>2026/8/28</a:t>
             </a:fld>
             <a:endParaRPr lang="zh-TW" altLang="en-US"/>
           </a:p>
@@ -2079,7 +2079,7 @@
           <a:p>
             <a:fld id="{819CCEB0-8531-4DC7-874B-C34BB5A237D1}" type="datetimeFigureOut">
               <a:rPr lang="zh-TW" altLang="en-US" smtClean="0"/>
-              <a:t>2026/8/26</a:t>
+              <a:t>2026/8/28</a:t>
             </a:fld>
             <a:endParaRPr lang="zh-TW" altLang="en-US"/>
           </a:p>
@@ -2390,7 +2390,7 @@
           <a:p>
             <a:fld id="{819CCEB0-8531-4DC7-874B-C34BB5A237D1}" type="datetimeFigureOut">
               <a:rPr lang="zh-TW" altLang="en-US" smtClean="0"/>
-              <a:t>2026/8/26</a:t>
+              <a:t>2026/8/28</a:t>
             </a:fld>
             <a:endParaRPr lang="zh-TW" altLang="en-US"/>
           </a:p>
@@ -2678,7 +2678,7 @@
           <a:p>
             <a:fld id="{819CCEB0-8531-4DC7-874B-C34BB5A237D1}" type="datetimeFigureOut">
               <a:rPr lang="zh-TW" altLang="en-US" smtClean="0"/>
-              <a:t>2026/8/26</a:t>
+              <a:t>2026/8/28</a:t>
             </a:fld>
             <a:endParaRPr lang="zh-TW" altLang="en-US"/>
           </a:p>
@@ -2919,7 +2919,7 @@
           <a:p>
             <a:fld id="{819CCEB0-8531-4DC7-874B-C34BB5A237D1}" type="datetimeFigureOut">
               <a:rPr lang="zh-TW" altLang="en-US" smtClean="0"/>
-              <a:t>2026/8/26</a:t>
+              <a:t>2026/8/28</a:t>
             </a:fld>
             <a:endParaRPr lang="zh-TW" altLang="en-US"/>
           </a:p>
@@ -7935,10 +7935,10 @@
         <mc:Choice Requires="a14">
           <p:sp>
             <p:nvSpPr>
-              <p:cNvPr id="31" name="文字方塊 30">
+              <p:cNvPr id="32" name="文字方塊 31">
                 <a:extLst>
                   <a:ext uri="{FF2B5EF4-FFF2-40B4-BE49-F238E27FC236}">
-                    <a16:creationId xmlns:a16="http://schemas.microsoft.com/office/drawing/2014/main" id="{64DC3B77-C144-492D-948D-B4B58603040F}"/>
+                    <a16:creationId xmlns:a16="http://schemas.microsoft.com/office/drawing/2014/main" id="{09E3DD2E-983C-4DD9-8B03-097418640B4B}"/>
                   </a:ext>
                 </a:extLst>
               </p:cNvPr>
@@ -7947,7 +7947,599 @@
             </p:nvSpPr>
             <p:spPr>
               <a:xfrm>
-                <a:off x="135467" y="1102250"/>
+                <a:off x="5367871" y="768588"/>
+                <a:ext cx="6493929" cy="5176417"/>
+              </a:xfrm>
+              <a:prstGeom prst="rect">
+                <a:avLst/>
+              </a:prstGeom>
+              <a:noFill/>
+            </p:spPr>
+            <p:txBody>
+              <a:bodyPr wrap="square" rtlCol="0">
+                <a:spAutoFit/>
+              </a:bodyPr>
+              <a:lstStyle/>
+              <a:p>
+                <a:pPr marL="342900" indent="-342900">
+                  <a:buFont typeface="+mj-lt"/>
+                  <a:buAutoNum type="arabicPeriod" startAt="4"/>
+                </a:pPr>
+                <a:r>
+                  <a:rPr lang="en-US" altLang="zh-TW" dirty="0"/>
+                  <a:t>Localization: Determine which tetrahedron contains each query point and return its coordinates relative to the four vertices.</a:t>
+                </a:r>
+              </a:p>
+              <a:p>
+                <a:pPr marL="342900" indent="-342900">
+                  <a:buFont typeface="+mj-lt"/>
+                  <a:buAutoNum type="arabicPeriod" startAt="4"/>
+                </a:pPr>
+                <a:endParaRPr lang="en-US" altLang="zh-TW" dirty="0"/>
+              </a:p>
+              <a:p>
+                <a:pPr marL="342900" indent="-342900">
+                  <a:buFont typeface="+mj-lt"/>
+                  <a:buAutoNum type="arabicPeriod" startAt="4"/>
+                </a:pPr>
+                <a:r>
+                  <a:rPr lang="en-US" altLang="zh-TW" dirty="0"/>
+                  <a:t>Barycentric Interpolation:</a:t>
+                </a:r>
+              </a:p>
+              <a:p>
+                <a:pPr lvl="1"/>
+                <a:r>
+                  <a:rPr lang="en-US" altLang="zh-TW" dirty="0"/>
+                  <a:t>Let the coordinates of the four vertices be:</a:t>
+                </a:r>
+                <a14:m>
+                  <m:oMath xmlns:m="http://schemas.openxmlformats.org/officeDocument/2006/math">
+                    <m:sSub>
+                      <m:sSubPr>
+                        <m:ctrlPr>
+                          <a:rPr lang="en-US" altLang="zh-TW" i="1" smtClean="0">
+                            <a:latin typeface="Cambria Math" panose="02040503050406030204" pitchFamily="18" charset="0"/>
+                          </a:rPr>
+                        </m:ctrlPr>
+                      </m:sSubPr>
+                      <m:e>
+                        <m:r>
+                          <a:rPr lang="en-US" altLang="zh-TW" b="0" i="1" smtClean="0">
+                            <a:latin typeface="Cambria Math" panose="02040503050406030204" pitchFamily="18" charset="0"/>
+                          </a:rPr>
+                          <m:t>𝑃</m:t>
+                        </m:r>
+                      </m:e>
+                      <m:sub>
+                        <m:r>
+                          <a:rPr lang="en-US" altLang="zh-TW" b="0" i="1" smtClean="0">
+                            <a:latin typeface="Cambria Math" panose="02040503050406030204" pitchFamily="18" charset="0"/>
+                          </a:rPr>
+                          <m:t>1</m:t>
+                        </m:r>
+                      </m:sub>
+                    </m:sSub>
+                    <m:r>
+                      <a:rPr lang="en-US" altLang="zh-TW" b="0" i="1" smtClean="0">
+                        <a:latin typeface="Cambria Math" panose="02040503050406030204" pitchFamily="18" charset="0"/>
+                      </a:rPr>
+                      <m:t>,</m:t>
+                    </m:r>
+                    <m:sSub>
+                      <m:sSubPr>
+                        <m:ctrlPr>
+                          <a:rPr lang="en-US" altLang="zh-TW" b="0" i="1" smtClean="0">
+                            <a:latin typeface="Cambria Math" panose="02040503050406030204" pitchFamily="18" charset="0"/>
+                          </a:rPr>
+                        </m:ctrlPr>
+                      </m:sSubPr>
+                      <m:e>
+                        <m:r>
+                          <a:rPr lang="en-US" altLang="zh-TW" b="0" i="1" smtClean="0">
+                            <a:latin typeface="Cambria Math" panose="02040503050406030204" pitchFamily="18" charset="0"/>
+                          </a:rPr>
+                          <m:t>𝑃</m:t>
+                        </m:r>
+                      </m:e>
+                      <m:sub>
+                        <m:r>
+                          <a:rPr lang="en-US" altLang="zh-TW" b="0" i="1" smtClean="0">
+                            <a:latin typeface="Cambria Math" panose="02040503050406030204" pitchFamily="18" charset="0"/>
+                          </a:rPr>
+                          <m:t>2</m:t>
+                        </m:r>
+                      </m:sub>
+                    </m:sSub>
+                    <m:r>
+                      <a:rPr lang="en-US" altLang="zh-TW" b="0" i="1" smtClean="0">
+                        <a:latin typeface="Cambria Math" panose="02040503050406030204" pitchFamily="18" charset="0"/>
+                      </a:rPr>
+                      <m:t>,</m:t>
+                    </m:r>
+                    <m:sSub>
+                      <m:sSubPr>
+                        <m:ctrlPr>
+                          <a:rPr lang="en-US" altLang="zh-TW" b="0" i="1" smtClean="0">
+                            <a:latin typeface="Cambria Math" panose="02040503050406030204" pitchFamily="18" charset="0"/>
+                          </a:rPr>
+                        </m:ctrlPr>
+                      </m:sSubPr>
+                      <m:e>
+                        <m:r>
+                          <a:rPr lang="en-US" altLang="zh-TW" b="0" i="1" smtClean="0">
+                            <a:latin typeface="Cambria Math" panose="02040503050406030204" pitchFamily="18" charset="0"/>
+                          </a:rPr>
+                          <m:t>𝑃</m:t>
+                        </m:r>
+                      </m:e>
+                      <m:sub>
+                        <m:r>
+                          <a:rPr lang="en-US" altLang="zh-TW" b="0" i="1" smtClean="0">
+                            <a:latin typeface="Cambria Math" panose="02040503050406030204" pitchFamily="18" charset="0"/>
+                          </a:rPr>
+                          <m:t>3</m:t>
+                        </m:r>
+                      </m:sub>
+                    </m:sSub>
+                    <m:r>
+                      <a:rPr lang="en-US" altLang="zh-TW" b="0" i="1" smtClean="0">
+                        <a:latin typeface="Cambria Math" panose="02040503050406030204" pitchFamily="18" charset="0"/>
+                      </a:rPr>
+                      <m:t>,</m:t>
+                    </m:r>
+                    <m:sSub>
+                      <m:sSubPr>
+                        <m:ctrlPr>
+                          <a:rPr lang="en-US" altLang="zh-TW" b="0" i="1" smtClean="0">
+                            <a:latin typeface="Cambria Math" panose="02040503050406030204" pitchFamily="18" charset="0"/>
+                          </a:rPr>
+                        </m:ctrlPr>
+                      </m:sSubPr>
+                      <m:e>
+                        <m:r>
+                          <a:rPr lang="en-US" altLang="zh-TW" b="0" i="1" smtClean="0">
+                            <a:latin typeface="Cambria Math" panose="02040503050406030204" pitchFamily="18" charset="0"/>
+                          </a:rPr>
+                          <m:t>𝑃</m:t>
+                        </m:r>
+                      </m:e>
+                      <m:sub>
+                        <m:r>
+                          <a:rPr lang="en-US" altLang="zh-TW" b="0" i="1" smtClean="0">
+                            <a:latin typeface="Cambria Math" panose="02040503050406030204" pitchFamily="18" charset="0"/>
+                          </a:rPr>
+                          <m:t>4</m:t>
+                        </m:r>
+                      </m:sub>
+                    </m:sSub>
+                  </m:oMath>
+                </a14:m>
+                <a:endParaRPr lang="en-US" altLang="zh-TW" dirty="0"/>
+              </a:p>
+              <a:p>
+                <a:pPr lvl="1"/>
+                <a:r>
+                  <a:rPr lang="en-US" altLang="zh-TW" dirty="0"/>
+                  <a:t>Let the coordinates of the interpolation point be:</a:t>
+                </a:r>
+                <a14:m>
+                  <m:oMath xmlns:m="http://schemas.openxmlformats.org/officeDocument/2006/math">
+                    <m:r>
+                      <a:rPr lang="en-US" altLang="zh-TW" b="0" i="1" smtClean="0">
+                        <a:latin typeface="Cambria Math" panose="02040503050406030204" pitchFamily="18" charset="0"/>
+                      </a:rPr>
+                      <m:t>𝑃</m:t>
+                    </m:r>
+                  </m:oMath>
+                </a14:m>
+                <a:endParaRPr lang="en-US" altLang="zh-TW" dirty="0"/>
+              </a:p>
+              <a:p>
+                <a:pPr lvl="1"/>
+                <a14:m>
+                  <m:oMathPara xmlns:m="http://schemas.openxmlformats.org/officeDocument/2006/math">
+                    <m:oMathParaPr>
+                      <m:jc m:val="centerGroup"/>
+                    </m:oMathParaPr>
+                    <m:oMath xmlns:m="http://schemas.openxmlformats.org/officeDocument/2006/math">
+                      <m:r>
+                        <a:rPr lang="en-US" altLang="zh-TW" b="0" i="1" smtClean="0">
+                          <a:latin typeface="Cambria Math" panose="02040503050406030204" pitchFamily="18" charset="0"/>
+                        </a:rPr>
+                        <m:t>𝑃</m:t>
+                      </m:r>
+                      <m:r>
+                        <a:rPr lang="en-US" altLang="zh-TW" b="0" i="1" smtClean="0">
+                          <a:latin typeface="Cambria Math" panose="02040503050406030204" pitchFamily="18" charset="0"/>
+                        </a:rPr>
+                        <m:t>=</m:t>
+                      </m:r>
+                      <m:nary>
+                        <m:naryPr>
+                          <m:chr m:val="∑"/>
+                          <m:ctrlPr>
+                            <a:rPr lang="en-US" altLang="zh-TW" b="0" i="1" smtClean="0">
+                              <a:latin typeface="Cambria Math" panose="02040503050406030204" pitchFamily="18" charset="0"/>
+                            </a:rPr>
+                          </m:ctrlPr>
+                        </m:naryPr>
+                        <m:sub>
+                          <m:r>
+                            <m:rPr>
+                              <m:brk m:alnAt="23"/>
+                            </m:rPr>
+                            <a:rPr lang="en-US" altLang="zh-TW" b="0" i="1" smtClean="0">
+                              <a:latin typeface="Cambria Math" panose="02040503050406030204" pitchFamily="18" charset="0"/>
+                            </a:rPr>
+                            <m:t>𝑖</m:t>
+                          </m:r>
+                          <m:r>
+                            <a:rPr lang="en-US" altLang="zh-TW" b="0" i="1" smtClean="0">
+                              <a:latin typeface="Cambria Math" panose="02040503050406030204" pitchFamily="18" charset="0"/>
+                            </a:rPr>
+                            <m:t>=1</m:t>
+                          </m:r>
+                        </m:sub>
+                        <m:sup>
+                          <m:r>
+                            <a:rPr lang="en-US" altLang="zh-TW" b="0" i="1" smtClean="0">
+                              <a:latin typeface="Cambria Math" panose="02040503050406030204" pitchFamily="18" charset="0"/>
+                            </a:rPr>
+                            <m:t>4</m:t>
+                          </m:r>
+                        </m:sup>
+                        <m:e>
+                          <m:sSub>
+                            <m:sSubPr>
+                              <m:ctrlPr>
+                                <a:rPr lang="en-US" altLang="zh-TW" b="0" i="1" smtClean="0">
+                                  <a:latin typeface="Cambria Math" panose="02040503050406030204" pitchFamily="18" charset="0"/>
+                                </a:rPr>
+                              </m:ctrlPr>
+                            </m:sSubPr>
+                            <m:e>
+                              <m:r>
+                                <a:rPr lang="zh-TW" altLang="en-US" b="0" i="1" smtClean="0">
+                                  <a:latin typeface="Cambria Math" panose="02040503050406030204" pitchFamily="18" charset="0"/>
+                                </a:rPr>
+                                <m:t>𝜆</m:t>
+                              </m:r>
+                            </m:e>
+                            <m:sub>
+                              <m:r>
+                                <a:rPr lang="en-US" altLang="zh-TW" b="0" i="1" smtClean="0">
+                                  <a:latin typeface="Cambria Math" panose="02040503050406030204" pitchFamily="18" charset="0"/>
+                                </a:rPr>
+                                <m:t>𝑖</m:t>
+                              </m:r>
+                            </m:sub>
+                          </m:sSub>
+                          <m:sSub>
+                            <m:sSubPr>
+                              <m:ctrlPr>
+                                <a:rPr lang="en-US" altLang="zh-TW" b="0" i="1" smtClean="0">
+                                  <a:latin typeface="Cambria Math" panose="02040503050406030204" pitchFamily="18" charset="0"/>
+                                </a:rPr>
+                              </m:ctrlPr>
+                            </m:sSubPr>
+                            <m:e>
+                              <m:r>
+                                <a:rPr lang="en-US" altLang="zh-TW" b="0" i="1" smtClean="0">
+                                  <a:latin typeface="Cambria Math" panose="02040503050406030204" pitchFamily="18" charset="0"/>
+                                </a:rPr>
+                                <m:t>𝑃</m:t>
+                              </m:r>
+                            </m:e>
+                            <m:sub>
+                              <m:r>
+                                <a:rPr lang="en-US" altLang="zh-TW" b="0" i="1" smtClean="0">
+                                  <a:latin typeface="Cambria Math" panose="02040503050406030204" pitchFamily="18" charset="0"/>
+                                </a:rPr>
+                                <m:t>𝑖</m:t>
+                              </m:r>
+                            </m:sub>
+                          </m:sSub>
+                        </m:e>
+                      </m:nary>
+                    </m:oMath>
+                  </m:oMathPara>
+                </a14:m>
+                <a:endParaRPr lang="en-US" altLang="zh-TW" dirty="0"/>
+              </a:p>
+              <a:p>
+                <a:pPr lvl="1"/>
+                <a:r>
+                  <a:rPr lang="en-US" altLang="zh-TW" dirty="0"/>
+                  <a:t>Where </a:t>
+                </a:r>
+                <a14:m>
+                  <m:oMath xmlns:m="http://schemas.openxmlformats.org/officeDocument/2006/math">
+                    <m:sSub>
+                      <m:sSubPr>
+                        <m:ctrlPr>
+                          <a:rPr lang="en-US" altLang="zh-TW" i="1" smtClean="0">
+                            <a:latin typeface="Cambria Math" panose="02040503050406030204" pitchFamily="18" charset="0"/>
+                          </a:rPr>
+                        </m:ctrlPr>
+                      </m:sSubPr>
+                      <m:e>
+                        <m:r>
+                          <a:rPr lang="zh-TW" altLang="en-US" i="1" smtClean="0">
+                            <a:latin typeface="Cambria Math" panose="02040503050406030204" pitchFamily="18" charset="0"/>
+                          </a:rPr>
+                          <m:t>𝜆</m:t>
+                        </m:r>
+                      </m:e>
+                      <m:sub>
+                        <m:r>
+                          <a:rPr lang="en-US" altLang="zh-TW" b="0" i="1" smtClean="0">
+                            <a:latin typeface="Cambria Math" panose="02040503050406030204" pitchFamily="18" charset="0"/>
+                          </a:rPr>
+                          <m:t>𝑖</m:t>
+                        </m:r>
+                      </m:sub>
+                    </m:sSub>
+                    <m:r>
+                      <a:rPr lang="en-US" altLang="zh-TW" b="0" i="1" smtClean="0">
+                        <a:latin typeface="Cambria Math" panose="02040503050406030204" pitchFamily="18" charset="0"/>
+                      </a:rPr>
+                      <m:t>=</m:t>
+                    </m:r>
+                    <m:f>
+                      <m:fPr>
+                        <m:ctrlPr>
+                          <a:rPr lang="en-US" altLang="zh-TW" b="0" i="1" smtClean="0">
+                            <a:latin typeface="Cambria Math" panose="02040503050406030204" pitchFamily="18" charset="0"/>
+                          </a:rPr>
+                        </m:ctrlPr>
+                      </m:fPr>
+                      <m:num>
+                        <m:sSub>
+                          <m:sSubPr>
+                            <m:ctrlPr>
+                              <a:rPr lang="en-US" altLang="zh-TW" b="0" i="1" smtClean="0">
+                                <a:latin typeface="Cambria Math" panose="02040503050406030204" pitchFamily="18" charset="0"/>
+                              </a:rPr>
+                            </m:ctrlPr>
+                          </m:sSubPr>
+                          <m:e>
+                            <m:r>
+                              <a:rPr lang="en-US" altLang="zh-TW" b="0" i="1" smtClean="0">
+                                <a:latin typeface="Cambria Math" panose="02040503050406030204" pitchFamily="18" charset="0"/>
+                              </a:rPr>
+                              <m:t>𝑉</m:t>
+                            </m:r>
+                          </m:e>
+                          <m:sub>
+                            <m:r>
+                              <a:rPr lang="en-US" altLang="zh-TW" b="0" i="1" smtClean="0">
+                                <a:latin typeface="Cambria Math" panose="02040503050406030204" pitchFamily="18" charset="0"/>
+                              </a:rPr>
+                              <m:t>𝑖</m:t>
+                            </m:r>
+                          </m:sub>
+                        </m:sSub>
+                      </m:num>
+                      <m:den>
+                        <m:sSub>
+                          <m:sSubPr>
+                            <m:ctrlPr>
+                              <a:rPr lang="en-US" altLang="zh-TW" b="0" i="1" smtClean="0">
+                                <a:latin typeface="Cambria Math" panose="02040503050406030204" pitchFamily="18" charset="0"/>
+                              </a:rPr>
+                            </m:ctrlPr>
+                          </m:sSubPr>
+                          <m:e>
+                            <m:r>
+                              <a:rPr lang="en-US" altLang="zh-TW" b="0" i="1" smtClean="0">
+                                <a:latin typeface="Cambria Math" panose="02040503050406030204" pitchFamily="18" charset="0"/>
+                              </a:rPr>
+                              <m:t>𝑉</m:t>
+                            </m:r>
+                          </m:e>
+                          <m:sub>
+                            <m:r>
+                              <a:rPr lang="en-US" altLang="zh-TW" b="0" i="1" smtClean="0">
+                                <a:latin typeface="Cambria Math" panose="02040503050406030204" pitchFamily="18" charset="0"/>
+                              </a:rPr>
+                              <m:t>𝑡𝑜𝑡𝑎𝑙</m:t>
+                            </m:r>
+                          </m:sub>
+                        </m:sSub>
+                      </m:den>
+                    </m:f>
+                  </m:oMath>
+                </a14:m>
+                <a:r>
+                  <a:rPr lang="en-US" altLang="zh-TW" dirty="0"/>
+                  <a:t>(The volume of the sub-tetrahedron formed by replacing vertex</a:t>
+                </a:r>
+                <a:r>
+                  <a:rPr lang="zh-TW" altLang="en-US" dirty="0"/>
+                  <a:t> </a:t>
+                </a:r>
+                <a14:m>
+                  <m:oMath xmlns:m="http://schemas.openxmlformats.org/officeDocument/2006/math">
+                    <m:sSub>
+                      <m:sSubPr>
+                        <m:ctrlPr>
+                          <a:rPr lang="en-US" altLang="zh-TW" i="1" smtClean="0">
+                            <a:latin typeface="Cambria Math" panose="02040503050406030204" pitchFamily="18" charset="0"/>
+                          </a:rPr>
+                        </m:ctrlPr>
+                      </m:sSubPr>
+                      <m:e>
+                        <m:r>
+                          <a:rPr lang="en-US" altLang="zh-TW" b="0" i="1" smtClean="0">
+                            <a:latin typeface="Cambria Math" panose="02040503050406030204" pitchFamily="18" charset="0"/>
+                          </a:rPr>
+                          <m:t>𝑃</m:t>
+                        </m:r>
+                      </m:e>
+                      <m:sub>
+                        <m:r>
+                          <a:rPr lang="en-US" altLang="zh-TW" b="0" i="1" smtClean="0">
+                            <a:latin typeface="Cambria Math" panose="02040503050406030204" pitchFamily="18" charset="0"/>
+                          </a:rPr>
+                          <m:t>𝑖</m:t>
+                        </m:r>
+                      </m:sub>
+                    </m:sSub>
+                  </m:oMath>
+                </a14:m>
+                <a:r>
+                  <a:rPr lang="en-US" altLang="zh-TW" dirty="0"/>
+                  <a:t> with </a:t>
+                </a:r>
+                <a14:m>
+                  <m:oMath xmlns:m="http://schemas.openxmlformats.org/officeDocument/2006/math">
+                    <m:r>
+                      <a:rPr lang="en-US" altLang="zh-TW" b="0" i="1" smtClean="0">
+                        <a:latin typeface="Cambria Math" panose="02040503050406030204" pitchFamily="18" charset="0"/>
+                      </a:rPr>
+                      <m:t>𝑃</m:t>
+                    </m:r>
+                  </m:oMath>
+                </a14:m>
+                <a:r>
+                  <a:rPr lang="en-US" altLang="zh-TW" dirty="0"/>
+                  <a:t>)</a:t>
+                </a:r>
+              </a:p>
+              <a:p>
+                <a:pPr lvl="1"/>
+                <a:endParaRPr lang="en-US" altLang="zh-TW" dirty="0"/>
+              </a:p>
+              <a:p>
+                <a:pPr marL="342900" indent="-342900">
+                  <a:buFont typeface="+mj-lt"/>
+                  <a:buAutoNum type="arabicPeriod" startAt="6"/>
+                </a:pPr>
+                <a:r>
+                  <a:rPr lang="en-US" altLang="zh-TW" dirty="0"/>
+                  <a:t>Repeat Steps 4 and 5 until all interpolation points have been processed.</a:t>
+                </a:r>
+              </a:p>
+              <a:p>
+                <a:pPr lvl="1"/>
+                <a:endParaRPr lang="en-US" altLang="zh-TW" dirty="0"/>
+              </a:p>
+              <a:p>
+                <a:endParaRPr lang="en-US" altLang="zh-TW" dirty="0"/>
+              </a:p>
+              <a:p>
+                <a:pPr lvl="1"/>
+                <a:endParaRPr lang="en-US" altLang="zh-TW" dirty="0"/>
+              </a:p>
+              <a:p>
+                <a:endParaRPr lang="zh-TW" altLang="en-US" dirty="0"/>
+              </a:p>
+            </p:txBody>
+          </p:sp>
+        </mc:Choice>
+        <mc:Fallback xmlns="">
+          <p:sp>
+            <p:nvSpPr>
+              <p:cNvPr id="32" name="文字方塊 31">
+                <a:extLst>
+                  <a:ext uri="{FF2B5EF4-FFF2-40B4-BE49-F238E27FC236}">
+                    <a16:creationId xmlns:a16="http://schemas.microsoft.com/office/drawing/2014/main" id="{09E3DD2E-983C-4DD9-8B03-097418640B4B}"/>
+                  </a:ext>
+                </a:extLst>
+              </p:cNvPr>
+              <p:cNvSpPr txBox="1">
+                <a:spLocks noRot="1" noChangeAspect="1" noMove="1" noResize="1" noEditPoints="1" noAdjustHandles="1" noChangeArrowheads="1" noChangeShapeType="1" noTextEdit="1"/>
+              </p:cNvSpPr>
+              <p:nvPr/>
+            </p:nvSpPr>
+            <p:spPr>
+              <a:xfrm>
+                <a:off x="5367871" y="768588"/>
+                <a:ext cx="6493929" cy="5176417"/>
+              </a:xfrm>
+              <a:prstGeom prst="rect">
+                <a:avLst/>
+              </a:prstGeom>
+              <a:blipFill>
+                <a:blip r:embed="rId3"/>
+                <a:stretch>
+                  <a:fillRect l="-845" t="-589" r="-376"/>
+                </a:stretch>
+              </a:blipFill>
+            </p:spPr>
+            <p:txBody>
+              <a:bodyPr/>
+              <a:lstStyle/>
+              <a:p>
+                <a:r>
+                  <a:rPr lang="zh-TW" altLang="en-US">
+                    <a:noFill/>
+                  </a:rPr>
+                  <a:t> </a:t>
+                </a:r>
+              </a:p>
+            </p:txBody>
+          </p:sp>
+        </mc:Fallback>
+      </mc:AlternateContent>
+      <p:sp>
+        <p:nvSpPr>
+          <p:cNvPr id="3" name="文字方塊 2">
+            <a:extLst>
+              <a:ext uri="{FF2B5EF4-FFF2-40B4-BE49-F238E27FC236}">
+                <a16:creationId xmlns:a16="http://schemas.microsoft.com/office/drawing/2014/main" id="{6681FC3B-6D27-4632-802F-DE65E231DD79}"/>
+              </a:ext>
+            </a:extLst>
+          </p:cNvPr>
+          <p:cNvSpPr txBox="1"/>
+          <p:nvPr/>
+        </p:nvSpPr>
+        <p:spPr>
+          <a:xfrm>
+            <a:off x="5511800" y="5223933"/>
+            <a:ext cx="6426200" cy="923330"/>
+          </a:xfrm>
+          <a:prstGeom prst="rect">
+            <a:avLst/>
+          </a:prstGeom>
+          <a:noFill/>
+        </p:spPr>
+        <p:txBody>
+          <a:bodyPr wrap="square" rtlCol="0">
+            <a:spAutoFit/>
+          </a:bodyPr>
+          <a:lstStyle/>
+          <a:p>
+            <a:pPr marL="285750" indent="-285750">
+              <a:buFont typeface="Wingdings" panose="05000000000000000000" pitchFamily="2" charset="2"/>
+              <a:buChar char="u"/>
+            </a:pPr>
+            <a:r>
+              <a:rPr lang="en-US" altLang="zh-TW" dirty="0"/>
+              <a:t>Therefore, only Nr​ needs to be specified, while the other two parameters vary accordingly with Nr​. Thus, Nr​ is incremented starting from 1.</a:t>
+            </a:r>
+            <a:endParaRPr lang="zh-TW" altLang="en-US" dirty="0"/>
+          </a:p>
+        </p:txBody>
+      </p:sp>
+      <mc:AlternateContent xmlns:mc="http://schemas.openxmlformats.org/markup-compatibility/2006" xmlns:a14="http://schemas.microsoft.com/office/drawing/2010/main">
+        <mc:Choice Requires="a14">
+          <p:sp>
+            <p:nvSpPr>
+              <p:cNvPr id="8" name="文字方塊 7">
+                <a:extLst>
+                  <a:ext uri="{FF2B5EF4-FFF2-40B4-BE49-F238E27FC236}">
+                    <a16:creationId xmlns:a16="http://schemas.microsoft.com/office/drawing/2014/main" id="{D978473A-BC8F-4F10-9D18-5D2FB860C619}"/>
+                  </a:ext>
+                </a:extLst>
+              </p:cNvPr>
+              <p:cNvSpPr txBox="1"/>
+              <p:nvPr/>
+            </p:nvSpPr>
+            <p:spPr>
+              <a:xfrm>
+                <a:off x="135467" y="1153051"/>
                 <a:ext cx="5232404" cy="6356740"/>
               </a:xfrm>
               <a:prstGeom prst="rect">
@@ -8968,10 +9560,10 @@
         <mc:Fallback xmlns="">
           <p:sp>
             <p:nvSpPr>
-              <p:cNvPr id="31" name="文字方塊 30">
+              <p:cNvPr id="8" name="文字方塊 7">
                 <a:extLst>
                   <a:ext uri="{FF2B5EF4-FFF2-40B4-BE49-F238E27FC236}">
-                    <a16:creationId xmlns:a16="http://schemas.microsoft.com/office/drawing/2014/main" id="{64DC3B77-C144-492D-948D-B4B58603040F}"/>
+                    <a16:creationId xmlns:a16="http://schemas.microsoft.com/office/drawing/2014/main" id="{D978473A-BC8F-4F10-9D18-5D2FB860C619}"/>
                   </a:ext>
                 </a:extLst>
               </p:cNvPr>
@@ -8982,16 +9574,16 @@
             </p:nvSpPr>
             <p:spPr>
               <a:xfrm>
-                <a:off x="135467" y="1102250"/>
+                <a:off x="135467" y="1153051"/>
                 <a:ext cx="5232404" cy="6356740"/>
               </a:xfrm>
               <a:prstGeom prst="rect">
                 <a:avLst/>
               </a:prstGeom>
               <a:blipFill>
-                <a:blip r:embed="rId2"/>
+                <a:blip r:embed="rId4"/>
                 <a:stretch>
-                  <a:fillRect l="-931" t="-575" r="-349"/>
+                  <a:fillRect l="-931" t="-479" r="-349"/>
                 </a:stretch>
               </a:blipFill>
             </p:spPr>
@@ -9010,650 +9602,6 @@
           </p:sp>
         </mc:Fallback>
       </mc:AlternateContent>
-      <mc:AlternateContent xmlns:mc="http://schemas.openxmlformats.org/markup-compatibility/2006" xmlns:a14="http://schemas.microsoft.com/office/drawing/2010/main">
-        <mc:Choice Requires="a14">
-          <p:sp>
-            <p:nvSpPr>
-              <p:cNvPr id="32" name="文字方塊 31">
-                <a:extLst>
-                  <a:ext uri="{FF2B5EF4-FFF2-40B4-BE49-F238E27FC236}">
-                    <a16:creationId xmlns:a16="http://schemas.microsoft.com/office/drawing/2014/main" id="{09E3DD2E-983C-4DD9-8B03-097418640B4B}"/>
-                  </a:ext>
-                </a:extLst>
-              </p:cNvPr>
-              <p:cNvSpPr txBox="1"/>
-              <p:nvPr/>
-            </p:nvSpPr>
-            <p:spPr>
-              <a:xfrm>
-                <a:off x="5367871" y="768588"/>
-                <a:ext cx="6493929" cy="5176417"/>
-              </a:xfrm>
-              <a:prstGeom prst="rect">
-                <a:avLst/>
-              </a:prstGeom>
-              <a:noFill/>
-            </p:spPr>
-            <p:txBody>
-              <a:bodyPr wrap="square" rtlCol="0">
-                <a:spAutoFit/>
-              </a:bodyPr>
-              <a:lstStyle/>
-              <a:p>
-                <a:pPr marL="342900" indent="-342900">
-                  <a:buFont typeface="+mj-lt"/>
-                  <a:buAutoNum type="arabicPeriod" startAt="4"/>
-                </a:pPr>
-                <a:r>
-                  <a:rPr lang="en-US" altLang="zh-TW" dirty="0"/>
-                  <a:t>Localization: Determine which tetrahedron contains each query point and return its coordinates relative to the four vertices.</a:t>
-                </a:r>
-              </a:p>
-              <a:p>
-                <a:pPr marL="342900" indent="-342900">
-                  <a:buFont typeface="+mj-lt"/>
-                  <a:buAutoNum type="arabicPeriod" startAt="4"/>
-                </a:pPr>
-                <a:endParaRPr lang="en-US" altLang="zh-TW" dirty="0"/>
-              </a:p>
-              <a:p>
-                <a:pPr marL="342900" indent="-342900">
-                  <a:buFont typeface="+mj-lt"/>
-                  <a:buAutoNum type="arabicPeriod" startAt="4"/>
-                </a:pPr>
-                <a:r>
-                  <a:rPr lang="en-US" altLang="zh-TW" dirty="0"/>
-                  <a:t>Barycentric Interpolation:</a:t>
-                </a:r>
-              </a:p>
-              <a:p>
-                <a:pPr lvl="1"/>
-                <a:r>
-                  <a:rPr lang="en-US" altLang="zh-TW" dirty="0"/>
-                  <a:t>Let the coordinates of the four vertices be:</a:t>
-                </a:r>
-                <a14:m>
-                  <m:oMath xmlns:m="http://schemas.openxmlformats.org/officeDocument/2006/math">
-                    <m:sSub>
-                      <m:sSubPr>
-                        <m:ctrlPr>
-                          <a:rPr lang="en-US" altLang="zh-TW" i="1" smtClean="0">
-                            <a:latin typeface="Cambria Math" panose="02040503050406030204" pitchFamily="18" charset="0"/>
-                          </a:rPr>
-                        </m:ctrlPr>
-                      </m:sSubPr>
-                      <m:e>
-                        <m:r>
-                          <a:rPr lang="en-US" altLang="zh-TW" b="0" i="1" smtClean="0">
-                            <a:latin typeface="Cambria Math" panose="02040503050406030204" pitchFamily="18" charset="0"/>
-                          </a:rPr>
-                          <m:t>𝑃</m:t>
-                        </m:r>
-                      </m:e>
-                      <m:sub>
-                        <m:r>
-                          <a:rPr lang="en-US" altLang="zh-TW" b="0" i="1" smtClean="0">
-                            <a:latin typeface="Cambria Math" panose="02040503050406030204" pitchFamily="18" charset="0"/>
-                          </a:rPr>
-                          <m:t>1</m:t>
-                        </m:r>
-                      </m:sub>
-                    </m:sSub>
-                    <m:r>
-                      <a:rPr lang="en-US" altLang="zh-TW" b="0" i="1" smtClean="0">
-                        <a:latin typeface="Cambria Math" panose="02040503050406030204" pitchFamily="18" charset="0"/>
-                      </a:rPr>
-                      <m:t>,</m:t>
-                    </m:r>
-                    <m:sSub>
-                      <m:sSubPr>
-                        <m:ctrlPr>
-                          <a:rPr lang="en-US" altLang="zh-TW" b="0" i="1" smtClean="0">
-                            <a:latin typeface="Cambria Math" panose="02040503050406030204" pitchFamily="18" charset="0"/>
-                          </a:rPr>
-                        </m:ctrlPr>
-                      </m:sSubPr>
-                      <m:e>
-                        <m:r>
-                          <a:rPr lang="en-US" altLang="zh-TW" b="0" i="1" smtClean="0">
-                            <a:latin typeface="Cambria Math" panose="02040503050406030204" pitchFamily="18" charset="0"/>
-                          </a:rPr>
-                          <m:t>𝑃</m:t>
-                        </m:r>
-                      </m:e>
-                      <m:sub>
-                        <m:r>
-                          <a:rPr lang="en-US" altLang="zh-TW" b="0" i="1" smtClean="0">
-                            <a:latin typeface="Cambria Math" panose="02040503050406030204" pitchFamily="18" charset="0"/>
-                          </a:rPr>
-                          <m:t>2</m:t>
-                        </m:r>
-                      </m:sub>
-                    </m:sSub>
-                    <m:r>
-                      <a:rPr lang="en-US" altLang="zh-TW" b="0" i="1" smtClean="0">
-                        <a:latin typeface="Cambria Math" panose="02040503050406030204" pitchFamily="18" charset="0"/>
-                      </a:rPr>
-                      <m:t>,</m:t>
-                    </m:r>
-                    <m:sSub>
-                      <m:sSubPr>
-                        <m:ctrlPr>
-                          <a:rPr lang="en-US" altLang="zh-TW" b="0" i="1" smtClean="0">
-                            <a:latin typeface="Cambria Math" panose="02040503050406030204" pitchFamily="18" charset="0"/>
-                          </a:rPr>
-                        </m:ctrlPr>
-                      </m:sSubPr>
-                      <m:e>
-                        <m:r>
-                          <a:rPr lang="en-US" altLang="zh-TW" b="0" i="1" smtClean="0">
-                            <a:latin typeface="Cambria Math" panose="02040503050406030204" pitchFamily="18" charset="0"/>
-                          </a:rPr>
-                          <m:t>𝑃</m:t>
-                        </m:r>
-                      </m:e>
-                      <m:sub>
-                        <m:r>
-                          <a:rPr lang="en-US" altLang="zh-TW" b="0" i="1" smtClean="0">
-                            <a:latin typeface="Cambria Math" panose="02040503050406030204" pitchFamily="18" charset="0"/>
-                          </a:rPr>
-                          <m:t>3</m:t>
-                        </m:r>
-                      </m:sub>
-                    </m:sSub>
-                    <m:r>
-                      <a:rPr lang="en-US" altLang="zh-TW" b="0" i="1" smtClean="0">
-                        <a:latin typeface="Cambria Math" panose="02040503050406030204" pitchFamily="18" charset="0"/>
-                      </a:rPr>
-                      <m:t>,</m:t>
-                    </m:r>
-                    <m:sSub>
-                      <m:sSubPr>
-                        <m:ctrlPr>
-                          <a:rPr lang="en-US" altLang="zh-TW" b="0" i="1" smtClean="0">
-                            <a:latin typeface="Cambria Math" panose="02040503050406030204" pitchFamily="18" charset="0"/>
-                          </a:rPr>
-                        </m:ctrlPr>
-                      </m:sSubPr>
-                      <m:e>
-                        <m:r>
-                          <a:rPr lang="en-US" altLang="zh-TW" b="0" i="1" smtClean="0">
-                            <a:latin typeface="Cambria Math" panose="02040503050406030204" pitchFamily="18" charset="0"/>
-                          </a:rPr>
-                          <m:t>𝑃</m:t>
-                        </m:r>
-                      </m:e>
-                      <m:sub>
-                        <m:r>
-                          <a:rPr lang="en-US" altLang="zh-TW" b="0" i="1" smtClean="0">
-                            <a:latin typeface="Cambria Math" panose="02040503050406030204" pitchFamily="18" charset="0"/>
-                          </a:rPr>
-                          <m:t>4</m:t>
-                        </m:r>
-                      </m:sub>
-                    </m:sSub>
-                  </m:oMath>
-                </a14:m>
-                <a:endParaRPr lang="en-US" altLang="zh-TW" dirty="0"/>
-              </a:p>
-              <a:p>
-                <a:pPr lvl="1"/>
-                <a:r>
-                  <a:rPr lang="en-US" altLang="zh-TW" dirty="0"/>
-                  <a:t>Let the coordinates of the interpolation point be:</a:t>
-                </a:r>
-                <a14:m>
-                  <m:oMath xmlns:m="http://schemas.openxmlformats.org/officeDocument/2006/math">
-                    <m:r>
-                      <a:rPr lang="en-US" altLang="zh-TW" b="0" i="1" smtClean="0">
-                        <a:latin typeface="Cambria Math" panose="02040503050406030204" pitchFamily="18" charset="0"/>
-                      </a:rPr>
-                      <m:t>𝑃</m:t>
-                    </m:r>
-                  </m:oMath>
-                </a14:m>
-                <a:endParaRPr lang="en-US" altLang="zh-TW" dirty="0"/>
-              </a:p>
-              <a:p>
-                <a:pPr lvl="1"/>
-                <a14:m>
-                  <m:oMathPara xmlns:m="http://schemas.openxmlformats.org/officeDocument/2006/math">
-                    <m:oMathParaPr>
-                      <m:jc m:val="centerGroup"/>
-                    </m:oMathParaPr>
-                    <m:oMath xmlns:m="http://schemas.openxmlformats.org/officeDocument/2006/math">
-                      <m:r>
-                        <a:rPr lang="en-US" altLang="zh-TW" b="0" i="1" smtClean="0">
-                          <a:latin typeface="Cambria Math" panose="02040503050406030204" pitchFamily="18" charset="0"/>
-                        </a:rPr>
-                        <m:t>𝑃</m:t>
-                      </m:r>
-                      <m:r>
-                        <a:rPr lang="en-US" altLang="zh-TW" b="0" i="1" smtClean="0">
-                          <a:latin typeface="Cambria Math" panose="02040503050406030204" pitchFamily="18" charset="0"/>
-                        </a:rPr>
-                        <m:t>=</m:t>
-                      </m:r>
-                      <m:nary>
-                        <m:naryPr>
-                          <m:chr m:val="∑"/>
-                          <m:ctrlPr>
-                            <a:rPr lang="en-US" altLang="zh-TW" b="0" i="1" smtClean="0">
-                              <a:latin typeface="Cambria Math" panose="02040503050406030204" pitchFamily="18" charset="0"/>
-                            </a:rPr>
-                          </m:ctrlPr>
-                        </m:naryPr>
-                        <m:sub>
-                          <m:r>
-                            <m:rPr>
-                              <m:brk m:alnAt="23"/>
-                            </m:rPr>
-                            <a:rPr lang="en-US" altLang="zh-TW" b="0" i="1" smtClean="0">
-                              <a:latin typeface="Cambria Math" panose="02040503050406030204" pitchFamily="18" charset="0"/>
-                            </a:rPr>
-                            <m:t>𝑖</m:t>
-                          </m:r>
-                          <m:r>
-                            <a:rPr lang="en-US" altLang="zh-TW" b="0" i="1" smtClean="0">
-                              <a:latin typeface="Cambria Math" panose="02040503050406030204" pitchFamily="18" charset="0"/>
-                            </a:rPr>
-                            <m:t>=1</m:t>
-                          </m:r>
-                        </m:sub>
-                        <m:sup>
-                          <m:r>
-                            <a:rPr lang="en-US" altLang="zh-TW" b="0" i="1" smtClean="0">
-                              <a:latin typeface="Cambria Math" panose="02040503050406030204" pitchFamily="18" charset="0"/>
-                            </a:rPr>
-                            <m:t>4</m:t>
-                          </m:r>
-                        </m:sup>
-                        <m:e>
-                          <m:sSub>
-                            <m:sSubPr>
-                              <m:ctrlPr>
-                                <a:rPr lang="en-US" altLang="zh-TW" b="0" i="1" smtClean="0">
-                                  <a:latin typeface="Cambria Math" panose="02040503050406030204" pitchFamily="18" charset="0"/>
-                                </a:rPr>
-                              </m:ctrlPr>
-                            </m:sSubPr>
-                            <m:e>
-                              <m:r>
-                                <a:rPr lang="zh-TW" altLang="en-US" b="0" i="1" smtClean="0">
-                                  <a:latin typeface="Cambria Math" panose="02040503050406030204" pitchFamily="18" charset="0"/>
-                                </a:rPr>
-                                <m:t>𝜆</m:t>
-                              </m:r>
-                            </m:e>
-                            <m:sub>
-                              <m:r>
-                                <a:rPr lang="en-US" altLang="zh-TW" b="0" i="1" smtClean="0">
-                                  <a:latin typeface="Cambria Math" panose="02040503050406030204" pitchFamily="18" charset="0"/>
-                                </a:rPr>
-                                <m:t>𝑖</m:t>
-                              </m:r>
-                            </m:sub>
-                          </m:sSub>
-                          <m:sSub>
-                            <m:sSubPr>
-                              <m:ctrlPr>
-                                <a:rPr lang="en-US" altLang="zh-TW" b="0" i="1" smtClean="0">
-                                  <a:latin typeface="Cambria Math" panose="02040503050406030204" pitchFamily="18" charset="0"/>
-                                </a:rPr>
-                              </m:ctrlPr>
-                            </m:sSubPr>
-                            <m:e>
-                              <m:r>
-                                <a:rPr lang="en-US" altLang="zh-TW" b="0" i="1" smtClean="0">
-                                  <a:latin typeface="Cambria Math" panose="02040503050406030204" pitchFamily="18" charset="0"/>
-                                </a:rPr>
-                                <m:t>𝑃</m:t>
-                              </m:r>
-                            </m:e>
-                            <m:sub>
-                              <m:r>
-                                <a:rPr lang="en-US" altLang="zh-TW" b="0" i="1" smtClean="0">
-                                  <a:latin typeface="Cambria Math" panose="02040503050406030204" pitchFamily="18" charset="0"/>
-                                </a:rPr>
-                                <m:t>𝑖</m:t>
-                              </m:r>
-                            </m:sub>
-                          </m:sSub>
-                        </m:e>
-                      </m:nary>
-                    </m:oMath>
-                  </m:oMathPara>
-                </a14:m>
-                <a:endParaRPr lang="en-US" altLang="zh-TW" dirty="0"/>
-              </a:p>
-              <a:p>
-                <a:pPr lvl="1"/>
-                <a:r>
-                  <a:rPr lang="en-US" altLang="zh-TW" dirty="0"/>
-                  <a:t>Where </a:t>
-                </a:r>
-                <a14:m>
-                  <m:oMath xmlns:m="http://schemas.openxmlformats.org/officeDocument/2006/math">
-                    <m:sSub>
-                      <m:sSubPr>
-                        <m:ctrlPr>
-                          <a:rPr lang="en-US" altLang="zh-TW" i="1" smtClean="0">
-                            <a:latin typeface="Cambria Math" panose="02040503050406030204" pitchFamily="18" charset="0"/>
-                          </a:rPr>
-                        </m:ctrlPr>
-                      </m:sSubPr>
-                      <m:e>
-                        <m:r>
-                          <a:rPr lang="zh-TW" altLang="en-US" i="1" smtClean="0">
-                            <a:latin typeface="Cambria Math" panose="02040503050406030204" pitchFamily="18" charset="0"/>
-                          </a:rPr>
-                          <m:t>𝜆</m:t>
-                        </m:r>
-                      </m:e>
-                      <m:sub>
-                        <m:r>
-                          <a:rPr lang="en-US" altLang="zh-TW" b="0" i="1" smtClean="0">
-                            <a:latin typeface="Cambria Math" panose="02040503050406030204" pitchFamily="18" charset="0"/>
-                          </a:rPr>
-                          <m:t>𝑖</m:t>
-                        </m:r>
-                      </m:sub>
-                    </m:sSub>
-                    <m:r>
-                      <a:rPr lang="en-US" altLang="zh-TW" b="0" i="1" smtClean="0">
-                        <a:latin typeface="Cambria Math" panose="02040503050406030204" pitchFamily="18" charset="0"/>
-                      </a:rPr>
-                      <m:t>=</m:t>
-                    </m:r>
-                    <m:f>
-                      <m:fPr>
-                        <m:ctrlPr>
-                          <a:rPr lang="en-US" altLang="zh-TW" b="0" i="1" smtClean="0">
-                            <a:latin typeface="Cambria Math" panose="02040503050406030204" pitchFamily="18" charset="0"/>
-                          </a:rPr>
-                        </m:ctrlPr>
-                      </m:fPr>
-                      <m:num>
-                        <m:sSub>
-                          <m:sSubPr>
-                            <m:ctrlPr>
-                              <a:rPr lang="en-US" altLang="zh-TW" b="0" i="1" smtClean="0">
-                                <a:latin typeface="Cambria Math" panose="02040503050406030204" pitchFamily="18" charset="0"/>
-                              </a:rPr>
-                            </m:ctrlPr>
-                          </m:sSubPr>
-                          <m:e>
-                            <m:r>
-                              <a:rPr lang="en-US" altLang="zh-TW" b="0" i="1" smtClean="0">
-                                <a:latin typeface="Cambria Math" panose="02040503050406030204" pitchFamily="18" charset="0"/>
-                              </a:rPr>
-                              <m:t>𝑉</m:t>
-                            </m:r>
-                          </m:e>
-                          <m:sub>
-                            <m:r>
-                              <a:rPr lang="en-US" altLang="zh-TW" b="0" i="1" smtClean="0">
-                                <a:latin typeface="Cambria Math" panose="02040503050406030204" pitchFamily="18" charset="0"/>
-                              </a:rPr>
-                              <m:t>𝑖</m:t>
-                            </m:r>
-                          </m:sub>
-                        </m:sSub>
-                      </m:num>
-                      <m:den>
-                        <m:sSub>
-                          <m:sSubPr>
-                            <m:ctrlPr>
-                              <a:rPr lang="en-US" altLang="zh-TW" b="0" i="1" smtClean="0">
-                                <a:latin typeface="Cambria Math" panose="02040503050406030204" pitchFamily="18" charset="0"/>
-                              </a:rPr>
-                            </m:ctrlPr>
-                          </m:sSubPr>
-                          <m:e>
-                            <m:r>
-                              <a:rPr lang="en-US" altLang="zh-TW" b="0" i="1" smtClean="0">
-                                <a:latin typeface="Cambria Math" panose="02040503050406030204" pitchFamily="18" charset="0"/>
-                              </a:rPr>
-                              <m:t>𝑉</m:t>
-                            </m:r>
-                          </m:e>
-                          <m:sub>
-                            <m:r>
-                              <a:rPr lang="en-US" altLang="zh-TW" b="0" i="1" smtClean="0">
-                                <a:latin typeface="Cambria Math" panose="02040503050406030204" pitchFamily="18" charset="0"/>
-                              </a:rPr>
-                              <m:t>𝑡𝑜𝑡𝑎𝑙</m:t>
-                            </m:r>
-                          </m:sub>
-                        </m:sSub>
-                      </m:den>
-                    </m:f>
-                  </m:oMath>
-                </a14:m>
-                <a:r>
-                  <a:rPr lang="en-US" altLang="zh-TW" dirty="0"/>
-                  <a:t>(The volume of the sub-tetrahedron formed by replacing vertex</a:t>
-                </a:r>
-                <a:r>
-                  <a:rPr lang="zh-TW" altLang="en-US" dirty="0"/>
-                  <a:t> </a:t>
-                </a:r>
-                <a14:m>
-                  <m:oMath xmlns:m="http://schemas.openxmlformats.org/officeDocument/2006/math">
-                    <m:sSub>
-                      <m:sSubPr>
-                        <m:ctrlPr>
-                          <a:rPr lang="en-US" altLang="zh-TW" i="1" smtClean="0">
-                            <a:latin typeface="Cambria Math" panose="02040503050406030204" pitchFamily="18" charset="0"/>
-                          </a:rPr>
-                        </m:ctrlPr>
-                      </m:sSubPr>
-                      <m:e>
-                        <m:r>
-                          <a:rPr lang="en-US" altLang="zh-TW" b="0" i="1" smtClean="0">
-                            <a:latin typeface="Cambria Math" panose="02040503050406030204" pitchFamily="18" charset="0"/>
-                          </a:rPr>
-                          <m:t>𝑃</m:t>
-                        </m:r>
-                      </m:e>
-                      <m:sub>
-                        <m:r>
-                          <a:rPr lang="en-US" altLang="zh-TW" b="0" i="1" smtClean="0">
-                            <a:latin typeface="Cambria Math" panose="02040503050406030204" pitchFamily="18" charset="0"/>
-                          </a:rPr>
-                          <m:t>𝑖</m:t>
-                        </m:r>
-                      </m:sub>
-                    </m:sSub>
-                  </m:oMath>
-                </a14:m>
-                <a:r>
-                  <a:rPr lang="en-US" altLang="zh-TW" dirty="0"/>
-                  <a:t> with </a:t>
-                </a:r>
-                <a14:m>
-                  <m:oMath xmlns:m="http://schemas.openxmlformats.org/officeDocument/2006/math">
-                    <m:r>
-                      <a:rPr lang="en-US" altLang="zh-TW" b="0" i="1" smtClean="0">
-                        <a:latin typeface="Cambria Math" panose="02040503050406030204" pitchFamily="18" charset="0"/>
-                      </a:rPr>
-                      <m:t>𝑃</m:t>
-                    </m:r>
-                  </m:oMath>
-                </a14:m>
-                <a:r>
-                  <a:rPr lang="en-US" altLang="zh-TW" dirty="0"/>
-                  <a:t>)</a:t>
-                </a:r>
-              </a:p>
-              <a:p>
-                <a:pPr lvl="1"/>
-                <a:endParaRPr lang="en-US" altLang="zh-TW" dirty="0"/>
-              </a:p>
-              <a:p>
-                <a:pPr marL="342900" indent="-342900">
-                  <a:buFont typeface="+mj-lt"/>
-                  <a:buAutoNum type="arabicPeriod" startAt="6"/>
-                </a:pPr>
-                <a:r>
-                  <a:rPr lang="en-US" altLang="zh-TW" dirty="0"/>
-                  <a:t>Repeat Steps 4 and 5 until all interpolation points have been processed.</a:t>
-                </a:r>
-              </a:p>
-              <a:p>
-                <a:pPr lvl="1"/>
-                <a:endParaRPr lang="en-US" altLang="zh-TW" dirty="0"/>
-              </a:p>
-              <a:p>
-                <a:endParaRPr lang="en-US" altLang="zh-TW" dirty="0"/>
-              </a:p>
-              <a:p>
-                <a:pPr lvl="1"/>
-                <a:endParaRPr lang="en-US" altLang="zh-TW" dirty="0"/>
-              </a:p>
-              <a:p>
-                <a:endParaRPr lang="zh-TW" altLang="en-US" dirty="0"/>
-              </a:p>
-            </p:txBody>
-          </p:sp>
-        </mc:Choice>
-        <mc:Fallback xmlns="">
-          <p:sp>
-            <p:nvSpPr>
-              <p:cNvPr id="32" name="文字方塊 31">
-                <a:extLst>
-                  <a:ext uri="{FF2B5EF4-FFF2-40B4-BE49-F238E27FC236}">
-                    <a16:creationId xmlns:a16="http://schemas.microsoft.com/office/drawing/2014/main" id="{09E3DD2E-983C-4DD9-8B03-097418640B4B}"/>
-                  </a:ext>
-                </a:extLst>
-              </p:cNvPr>
-              <p:cNvSpPr txBox="1">
-                <a:spLocks noRot="1" noChangeAspect="1" noMove="1" noResize="1" noEditPoints="1" noAdjustHandles="1" noChangeArrowheads="1" noChangeShapeType="1" noTextEdit="1"/>
-              </p:cNvSpPr>
-              <p:nvPr/>
-            </p:nvSpPr>
-            <p:spPr>
-              <a:xfrm>
-                <a:off x="5367871" y="768588"/>
-                <a:ext cx="6493929" cy="5176417"/>
-              </a:xfrm>
-              <a:prstGeom prst="rect">
-                <a:avLst/>
-              </a:prstGeom>
-              <a:blipFill>
-                <a:blip r:embed="rId3"/>
-                <a:stretch>
-                  <a:fillRect l="-845" t="-589" r="-376"/>
-                </a:stretch>
-              </a:blipFill>
-            </p:spPr>
-            <p:txBody>
-              <a:bodyPr/>
-              <a:lstStyle/>
-              <a:p>
-                <a:r>
-                  <a:rPr lang="zh-TW" altLang="en-US">
-                    <a:noFill/>
-                  </a:rPr>
-                  <a:t> </a:t>
-                </a:r>
-              </a:p>
-            </p:txBody>
-          </p:sp>
-        </mc:Fallback>
-      </mc:AlternateContent>
-      <p:sp>
-        <p:nvSpPr>
-          <p:cNvPr id="3" name="文字方塊 2">
-            <a:extLst>
-              <a:ext uri="{FF2B5EF4-FFF2-40B4-BE49-F238E27FC236}">
-                <a16:creationId xmlns:a16="http://schemas.microsoft.com/office/drawing/2014/main" id="{6681FC3B-6D27-4632-802F-DE65E231DD79}"/>
-              </a:ext>
-            </a:extLst>
-          </p:cNvPr>
-          <p:cNvSpPr txBox="1"/>
-          <p:nvPr/>
-        </p:nvSpPr>
-        <p:spPr>
-          <a:xfrm>
-            <a:off x="5511800" y="5223933"/>
-            <a:ext cx="6426200" cy="923330"/>
-          </a:xfrm>
-          <a:prstGeom prst="rect">
-            <a:avLst/>
-          </a:prstGeom>
-          <a:noFill/>
-        </p:spPr>
-        <p:txBody>
-          <a:bodyPr wrap="square" rtlCol="0">
-            <a:spAutoFit/>
-          </a:bodyPr>
-          <a:lstStyle/>
-          <a:p>
-            <a:pPr marL="285750" indent="-285750">
-              <a:buFont typeface="Wingdings" panose="05000000000000000000" pitchFamily="2" charset="2"/>
-              <a:buChar char="u"/>
-            </a:pPr>
-            <a:r>
-              <a:rPr lang="en-US" altLang="zh-TW" dirty="0"/>
-              <a:t>Therefore, only Nr​ needs to be specified, while the other two parameters vary accordingly with Nr​. Thus, Nr​ is incremented starting from 1.</a:t>
-            </a:r>
-            <a:endParaRPr lang="zh-TW" altLang="en-US" dirty="0"/>
-          </a:p>
-        </p:txBody>
-      </p:sp>
-      <p:sp>
-        <p:nvSpPr>
-          <p:cNvPr id="4" name="矩形 3">
-            <a:extLst>
-              <a:ext uri="{FF2B5EF4-FFF2-40B4-BE49-F238E27FC236}">
-                <a16:creationId xmlns:a16="http://schemas.microsoft.com/office/drawing/2014/main" id="{4DE6C6A3-535C-4816-8772-9AE8E5FFDDF1}"/>
-              </a:ext>
-            </a:extLst>
-          </p:cNvPr>
-          <p:cNvSpPr/>
-          <p:nvPr/>
-        </p:nvSpPr>
-        <p:spPr>
-          <a:xfrm>
-            <a:off x="135467" y="2489200"/>
-            <a:ext cx="5156204" cy="3344333"/>
-          </a:xfrm>
-          <a:prstGeom prst="rect">
-            <a:avLst/>
-          </a:prstGeom>
-          <a:noFill/>
-          <a:ln>
-            <a:solidFill>
-              <a:srgbClr val="FF0000"/>
-            </a:solidFill>
-          </a:ln>
-        </p:spPr>
-        <p:style>
-          <a:lnRef idx="2">
-            <a:schemeClr val="accent1">
-              <a:shade val="50000"/>
-            </a:schemeClr>
-          </a:lnRef>
-          <a:fillRef idx="1">
-            <a:schemeClr val="accent1"/>
-          </a:fillRef>
-          <a:effectRef idx="0">
-            <a:schemeClr val="accent1"/>
-          </a:effectRef>
-          <a:fontRef idx="minor">
-            <a:schemeClr val="lt1"/>
-          </a:fontRef>
-        </p:style>
-        <p:txBody>
-          <a:bodyPr rtlCol="0" anchor="ctr"/>
-          <a:lstStyle/>
-          <a:p>
-            <a:pPr algn="ctr"/>
-            <a:endParaRPr lang="zh-TW" altLang="en-US"/>
-          </a:p>
-        </p:txBody>
-      </p:sp>
     </p:spTree>
     <p:extLst>
       <p:ext uri="{BB962C8B-B14F-4D97-AF65-F5344CB8AC3E}">
@@ -28215,6 +28163,15 @@
 </file>
 
 <file path=customXml/item1.xml><?xml version="1.0" encoding="utf-8"?>
+<?mso-contentType ?>
+<FormTemplates xmlns="http://schemas.microsoft.com/sharepoint/v3/contenttype/forms">
+  <Display>DocumentLibraryForm</Display>
+  <Edit>DocumentLibraryForm</Edit>
+  <New>DocumentLibraryForm</New>
+</FormTemplates>
+</file>
+
+<file path=customXml/item2.xml><?xml version="1.0" encoding="utf-8"?>
 <ct:contentTypeSchema xmlns:ct="http://schemas.microsoft.com/office/2006/metadata/contentType" xmlns:ma="http://schemas.microsoft.com/office/2006/metadata/properties/metaAttributes" ct:_="" ma:_="" ma:contentTypeName="文件" ma:contentTypeID="0x01010054C95B48AB74B74197718A0A5C36A845" ma:contentTypeVersion="4" ma:contentTypeDescription="建立新的文件。" ma:contentTypeScope="" ma:versionID="66bee7b78bdbe1f1964d1b03a2fab72f">
   <xsd:schema xmlns:xsd="http://www.w3.org/2001/XMLSchema" xmlns:xs="http://www.w3.org/2001/XMLSchema" xmlns:p="http://schemas.microsoft.com/office/2006/metadata/properties" xmlns:ns3="dab69bd4-2317-4b7d-9ec9-5d414df95b9f" targetNamespace="http://schemas.microsoft.com/office/2006/metadata/properties" ma:root="true" ma:fieldsID="8c6c195b40798ed33a73cb7c88b59d11" ns3:_="">
     <xsd:import namespace="dab69bd4-2317-4b7d-9ec9-5d414df95b9f"/>
@@ -28358,22 +28315,21 @@
 </ct:contentTypeSchema>
 </file>
 
-<file path=customXml/item2.xml><?xml version="1.0" encoding="utf-8"?>
+<file path=customXml/item3.xml><?xml version="1.0" encoding="utf-8"?>
 <p:properties xmlns:p="http://schemas.microsoft.com/office/2006/metadata/properties" xmlns:xsi="http://www.w3.org/2001/XMLSchema-instance" xmlns:pc="http://schemas.microsoft.com/office/infopath/2007/PartnerControls">
   <documentManagement/>
 </p:properties>
 </file>
 
-<file path=customXml/item3.xml><?xml version="1.0" encoding="utf-8"?>
-<?mso-contentType ?>
-<FormTemplates xmlns="http://schemas.microsoft.com/sharepoint/v3/contenttype/forms">
-  <Display>DocumentLibraryForm</Display>
-  <Edit>DocumentLibraryForm</Edit>
-  <New>DocumentLibraryForm</New>
-</FormTemplates>
+<file path=customXml/itemProps1.xml><?xml version="1.0" encoding="utf-8"?>
+<ds:datastoreItem xmlns:ds="http://schemas.openxmlformats.org/officeDocument/2006/customXml" ds:itemID="{5745AC83-AF71-412B-91BE-183D8E1200AE}">
+  <ds:schemaRefs>
+    <ds:schemaRef ds:uri="http://schemas.microsoft.com/sharepoint/v3/contenttype/forms"/>
+  </ds:schemaRefs>
+</ds:datastoreItem>
 </file>
 
-<file path=customXml/itemProps1.xml><?xml version="1.0" encoding="utf-8"?>
+<file path=customXml/itemProps2.xml><?xml version="1.0" encoding="utf-8"?>
 <ds:datastoreItem xmlns:ds="http://schemas.openxmlformats.org/officeDocument/2006/customXml" ds:itemID="{D4D08E1F-0873-4013-B91C-20CDEC23B8E6}">
   <ds:schemaRefs>
     <ds:schemaRef ds:uri="http://schemas.microsoft.com/office/2006/metadata/contentType"/>
@@ -28391,7 +28347,7 @@
 </ds:datastoreItem>
 </file>
 
-<file path=customXml/itemProps2.xml><?xml version="1.0" encoding="utf-8"?>
+<file path=customXml/itemProps3.xml><?xml version="1.0" encoding="utf-8"?>
 <ds:datastoreItem xmlns:ds="http://schemas.openxmlformats.org/officeDocument/2006/customXml" ds:itemID="{38EA52B6-A488-4A49-9C16-6BED74742FE8}">
   <ds:schemaRefs>
     <ds:schemaRef ds:uri="http://purl.org/dc/dcmitype/"/>
@@ -28405,12 +28361,4 @@
     <ds:schemaRef ds:uri="dab69bd4-2317-4b7d-9ec9-5d414df95b9f"/>
   </ds:schemaRefs>
 </ds:datastoreItem>
-</file>
-
-<file path=customXml/itemProps3.xml><?xml version="1.0" encoding="utf-8"?>
-<ds:datastoreItem xmlns:ds="http://schemas.openxmlformats.org/officeDocument/2006/customXml" ds:itemID="{5745AC83-AF71-412B-91BE-183D8E1200AE}">
-  <ds:schemaRefs>
-    <ds:schemaRef ds:uri="http://schemas.microsoft.com/sharepoint/v3/contenttype/forms"/>
-  </ds:schemaRefs>
-</ds:datastoreItem>
 </file>